--- a/lessons/nclex_sepsis_recognition/package/20260911_NCLEX_Sepsis_Recognition_Part_1.pptx
+++ b/lessons/nclex_sepsis_recognition/package/20260911_NCLEX_Sepsis_Recognition_Part_1.pptx
@@ -1508,7 +1508,7 @@
           <a:lstStyle/>
           <a:p>
             <a:r>
-              <a:t>Closing frame. The patient from the opening case had one cue and no alarm. That is what this looks like in real life.</a:t>
+              <a:t>Four moves, in order, and they are the whole lesson. Notice: in a patient who might have an infection, anything new is a cue. Name it: which system is reporting, and which direction it is moving. Act together: escalation and stabilization run in parallel, not in sequence, because waiting to finish one before starting the other is how time is lost. Check again: the reassessment is the part that tells you whether any of it worked. Go back to the patient we opened with. One cue, no alarm, nobody shouting. That is what this looks like on a real unit, and it is why the four moves have to be a habit rather than a decision.</a:t>
             </a:r>
           </a:p>
         </p:txBody>
